--- a/schemes.pptx
+++ b/schemes.pptx
@@ -134,7 +134,7 @@
       </p:grpSpPr>
       <p:sp>
         <p:nvSpPr>
-          <p:cNvPr id="1514842456" name="Header Placeholder 1"/>
+          <p:cNvPr id="708317791" name="Header Placeholder 1"/>
           <p:cNvSpPr>
             <a:spLocks noGrp="1"/>
           </p:cNvSpPr>
@@ -168,7 +168,7 @@
       </p:sp>
       <p:sp>
         <p:nvSpPr>
-          <p:cNvPr id="485448965" name="Date Placeholder 2"/>
+          <p:cNvPr id="1449052199" name="Date Placeholder 2"/>
           <p:cNvSpPr>
             <a:spLocks noGrp="1"/>
           </p:cNvSpPr>
@@ -206,7 +206,7 @@
       </p:sp>
       <p:sp>
         <p:nvSpPr>
-          <p:cNvPr id="512730043" name="Slide Image Placeholder 3"/>
+          <p:cNvPr id="1362314197" name="Slide Image Placeholder 3"/>
           <p:cNvSpPr>
             <a:spLocks noChangeAspect="1" noGrp="1" noRot="1"/>
           </p:cNvSpPr>
@@ -242,7 +242,7 @@
       </p:sp>
       <p:sp>
         <p:nvSpPr>
-          <p:cNvPr id="2022350715" name="Notes Placeholder 4"/>
+          <p:cNvPr id="51488916" name="Notes Placeholder 4"/>
           <p:cNvSpPr>
             <a:spLocks noGrp="1"/>
           </p:cNvSpPr>
@@ -316,7 +316,7 @@
       </p:sp>
       <p:sp>
         <p:nvSpPr>
-          <p:cNvPr id="548289118" name="Footer Placeholder 5"/>
+          <p:cNvPr id="333738420" name="Footer Placeholder 5"/>
           <p:cNvSpPr>
             <a:spLocks noGrp="1"/>
           </p:cNvSpPr>
@@ -350,7 +350,7 @@
       </p:sp>
       <p:sp>
         <p:nvSpPr>
-          <p:cNvPr id="1803183196" name="Slide Number Placeholder 6"/>
+          <p:cNvPr id="279155848" name="Slide Number Placeholder 6"/>
           <p:cNvSpPr>
             <a:spLocks noGrp="1"/>
           </p:cNvSpPr>
@@ -503,7 +503,7 @@
       </p:grpSpPr>
       <p:sp>
         <p:nvSpPr>
-          <p:cNvPr id="1343293169" name="Slide Image Placeholder 1"/>
+          <p:cNvPr id="1733628547" name="Slide Image Placeholder 1"/>
           <p:cNvSpPr>
             <a:spLocks noChangeAspect="1" noGrp="1" noRot="1"/>
           </p:cNvSpPr>
@@ -520,7 +520,7 @@
       </p:sp>
       <p:sp>
         <p:nvSpPr>
-          <p:cNvPr id="515216995" name="Notes Placeholder 2"/>
+          <p:cNvPr id="2015676877" name="Notes Placeholder 2"/>
           <p:cNvSpPr>
             <a:spLocks noGrp="1"/>
           </p:cNvSpPr>
@@ -545,7 +545,7 @@
       </p:sp>
       <p:sp>
         <p:nvSpPr>
-          <p:cNvPr id="273531072" name="Slide Number Placeholder 3"/>
+          <p:cNvPr id="163466102" name="Slide Number Placeholder 3"/>
           <p:cNvSpPr>
             <a:spLocks noGrp="1"/>
           </p:cNvSpPr>
@@ -596,7 +596,7 @@
       </p:grpSpPr>
       <p:sp>
         <p:nvSpPr>
-          <p:cNvPr id="489007187" name="Title 1"/>
+          <p:cNvPr id="1420882046" name="Title 1"/>
           <p:cNvSpPr>
             <a:spLocks noGrp="1"/>
           </p:cNvSpPr>
@@ -631,7 +631,7 @@
       </p:sp>
       <p:sp>
         <p:nvSpPr>
-          <p:cNvPr id="529481139" name="Subtitle 2"/>
+          <p:cNvPr id="1666402548" name="Subtitle 2"/>
           <p:cNvSpPr>
             <a:spLocks noGrp="1"/>
           </p:cNvSpPr>
@@ -699,7 +699,7 @@
       </p:sp>
       <p:sp>
         <p:nvSpPr>
-          <p:cNvPr id="1553634507" name="Date Placeholder 3"/>
+          <p:cNvPr id="61460030" name="Date Placeholder 3"/>
           <p:cNvSpPr>
             <a:spLocks noGrp="1"/>
           </p:cNvSpPr>
@@ -725,7 +725,7 @@
       </p:sp>
       <p:sp>
         <p:nvSpPr>
-          <p:cNvPr id="670032402" name="Footer Placeholder 4"/>
+          <p:cNvPr id="1845225950" name="Footer Placeholder 4"/>
           <p:cNvSpPr>
             <a:spLocks noGrp="1"/>
           </p:cNvSpPr>
@@ -747,7 +747,7 @@
       </p:sp>
       <p:sp>
         <p:nvSpPr>
-          <p:cNvPr id="1747879665" name="Slide Number Placeholder 5"/>
+          <p:cNvPr id="1285956880" name="Slide Number Placeholder 5"/>
           <p:cNvSpPr>
             <a:spLocks noGrp="1"/>
           </p:cNvSpPr>
@@ -798,7 +798,7 @@
       </p:grpSpPr>
       <p:sp>
         <p:nvSpPr>
-          <p:cNvPr id="482401980" name="Title 1"/>
+          <p:cNvPr id="673399494" name="Title 1"/>
           <p:cNvSpPr>
             <a:spLocks noGrp="1"/>
           </p:cNvSpPr>
@@ -824,7 +824,7 @@
       </p:sp>
       <p:sp>
         <p:nvSpPr>
-          <p:cNvPr id="1138855015" name="Vertical Text Placeholder 2"/>
+          <p:cNvPr id="1652831477" name="Vertical Text Placeholder 2"/>
           <p:cNvSpPr>
             <a:spLocks noGrp="1"/>
           </p:cNvSpPr>
@@ -890,7 +890,7 @@
       </p:sp>
       <p:sp>
         <p:nvSpPr>
-          <p:cNvPr id="1688017955" name="Date Placeholder 3"/>
+          <p:cNvPr id="1349105261" name="Date Placeholder 3"/>
           <p:cNvSpPr>
             <a:spLocks noGrp="1"/>
           </p:cNvSpPr>
@@ -916,7 +916,7 @@
       </p:sp>
       <p:sp>
         <p:nvSpPr>
-          <p:cNvPr id="1030582184" name="Footer Placeholder 4"/>
+          <p:cNvPr id="1891065754" name="Footer Placeholder 4"/>
           <p:cNvSpPr>
             <a:spLocks noGrp="1"/>
           </p:cNvSpPr>
@@ -938,7 +938,7 @@
       </p:sp>
       <p:sp>
         <p:nvSpPr>
-          <p:cNvPr id="2081732746" name="Slide Number Placeholder 5"/>
+          <p:cNvPr id="2145477363" name="Slide Number Placeholder 5"/>
           <p:cNvSpPr>
             <a:spLocks noGrp="1"/>
           </p:cNvSpPr>
@@ -989,7 +989,7 @@
       </p:grpSpPr>
       <p:sp>
         <p:nvSpPr>
-          <p:cNvPr id="250223797" name="Vertical Title 1"/>
+          <p:cNvPr id="707379524" name="Vertical Title 1"/>
           <p:cNvSpPr>
             <a:spLocks noGrp="1"/>
           </p:cNvSpPr>
@@ -1020,7 +1020,7 @@
       </p:sp>
       <p:sp>
         <p:nvSpPr>
-          <p:cNvPr id="808023574" name="Vertical Text Placeholder 2"/>
+          <p:cNvPr id="1653309092" name="Vertical Text Placeholder 2"/>
           <p:cNvSpPr>
             <a:spLocks noGrp="1"/>
           </p:cNvSpPr>
@@ -1091,7 +1091,7 @@
       </p:sp>
       <p:sp>
         <p:nvSpPr>
-          <p:cNvPr id="1023869262" name="Date Placeholder 3"/>
+          <p:cNvPr id="1228398228" name="Date Placeholder 3"/>
           <p:cNvSpPr>
             <a:spLocks noGrp="1"/>
           </p:cNvSpPr>
@@ -1117,7 +1117,7 @@
       </p:sp>
       <p:sp>
         <p:nvSpPr>
-          <p:cNvPr id="1576218760" name="Footer Placeholder 4"/>
+          <p:cNvPr id="930701749" name="Footer Placeholder 4"/>
           <p:cNvSpPr>
             <a:spLocks noGrp="1"/>
           </p:cNvSpPr>
@@ -1139,7 +1139,7 @@
       </p:sp>
       <p:sp>
         <p:nvSpPr>
-          <p:cNvPr id="1758060332" name="Slide Number Placeholder 5"/>
+          <p:cNvPr id="479334770" name="Slide Number Placeholder 5"/>
           <p:cNvSpPr>
             <a:spLocks noGrp="1"/>
           </p:cNvSpPr>
@@ -1190,7 +1190,7 @@
       </p:grpSpPr>
       <p:sp>
         <p:nvSpPr>
-          <p:cNvPr id="1035855476" name="Title 1"/>
+          <p:cNvPr id="975800075" name="Title 1"/>
           <p:cNvSpPr>
             <a:spLocks noGrp="1"/>
           </p:cNvSpPr>
@@ -1216,7 +1216,7 @@
       </p:sp>
       <p:sp>
         <p:nvSpPr>
-          <p:cNvPr id="1917870087" name="Content Placeholder 2"/>
+          <p:cNvPr id="1020511259" name="Content Placeholder 2"/>
           <p:cNvSpPr>
             <a:spLocks noGrp="1"/>
           </p:cNvSpPr>
@@ -1282,7 +1282,7 @@
       </p:sp>
       <p:sp>
         <p:nvSpPr>
-          <p:cNvPr id="862792246" name="Date Placeholder 3"/>
+          <p:cNvPr id="19715008" name="Date Placeholder 3"/>
           <p:cNvSpPr>
             <a:spLocks noGrp="1"/>
           </p:cNvSpPr>
@@ -1308,7 +1308,7 @@
       </p:sp>
       <p:sp>
         <p:nvSpPr>
-          <p:cNvPr id="1144505017" name="Footer Placeholder 4"/>
+          <p:cNvPr id="597578143" name="Footer Placeholder 4"/>
           <p:cNvSpPr>
             <a:spLocks noGrp="1"/>
           </p:cNvSpPr>
@@ -1330,7 +1330,7 @@
       </p:sp>
       <p:sp>
         <p:nvSpPr>
-          <p:cNvPr id="533425090" name="Slide Number Placeholder 5"/>
+          <p:cNvPr id="1013093990" name="Slide Number Placeholder 5"/>
           <p:cNvSpPr>
             <a:spLocks noGrp="1"/>
           </p:cNvSpPr>
@@ -1381,7 +1381,7 @@
       </p:grpSpPr>
       <p:sp>
         <p:nvSpPr>
-          <p:cNvPr id="1037102308" name="Title 1"/>
+          <p:cNvPr id="151181512" name="Title 1"/>
           <p:cNvSpPr>
             <a:spLocks noGrp="1"/>
           </p:cNvSpPr>
@@ -1416,7 +1416,7 @@
       </p:sp>
       <p:sp>
         <p:nvSpPr>
-          <p:cNvPr id="757798664" name="Text Placeholder 2"/>
+          <p:cNvPr id="2027245422" name="Text Placeholder 2"/>
           <p:cNvSpPr>
             <a:spLocks noGrp="1"/>
           </p:cNvSpPr>
@@ -1538,7 +1538,7 @@
       </p:sp>
       <p:sp>
         <p:nvSpPr>
-          <p:cNvPr id="223884335" name="Date Placeholder 3"/>
+          <p:cNvPr id="15320491" name="Date Placeholder 3"/>
           <p:cNvSpPr>
             <a:spLocks noGrp="1"/>
           </p:cNvSpPr>
@@ -1564,7 +1564,7 @@
       </p:sp>
       <p:sp>
         <p:nvSpPr>
-          <p:cNvPr id="1753830608" name="Footer Placeholder 4"/>
+          <p:cNvPr id="2123775735" name="Footer Placeholder 4"/>
           <p:cNvSpPr>
             <a:spLocks noGrp="1"/>
           </p:cNvSpPr>
@@ -1586,7 +1586,7 @@
       </p:sp>
       <p:sp>
         <p:nvSpPr>
-          <p:cNvPr id="69587432" name="Slide Number Placeholder 5"/>
+          <p:cNvPr id="1690698766" name="Slide Number Placeholder 5"/>
           <p:cNvSpPr>
             <a:spLocks noGrp="1"/>
           </p:cNvSpPr>
@@ -1637,7 +1637,7 @@
       </p:grpSpPr>
       <p:sp>
         <p:nvSpPr>
-          <p:cNvPr id="1966167307" name="Title 1"/>
+          <p:cNvPr id="1083448804" name="Title 1"/>
           <p:cNvSpPr>
             <a:spLocks noGrp="1"/>
           </p:cNvSpPr>
@@ -1663,7 +1663,7 @@
       </p:sp>
       <p:sp>
         <p:nvSpPr>
-          <p:cNvPr id="759947372" name="Content Placeholder 2"/>
+          <p:cNvPr id="90402123" name="Content Placeholder 2"/>
           <p:cNvSpPr>
             <a:spLocks noGrp="1"/>
           </p:cNvSpPr>
@@ -1734,7 +1734,7 @@
       </p:sp>
       <p:sp>
         <p:nvSpPr>
-          <p:cNvPr id="916193305" name="Content Placeholder 3"/>
+          <p:cNvPr id="409417168" name="Content Placeholder 3"/>
           <p:cNvSpPr>
             <a:spLocks noGrp="1"/>
           </p:cNvSpPr>
@@ -1805,7 +1805,7 @@
       </p:sp>
       <p:sp>
         <p:nvSpPr>
-          <p:cNvPr id="1805347992" name="Date Placeholder 4"/>
+          <p:cNvPr id="1592828727" name="Date Placeholder 4"/>
           <p:cNvSpPr>
             <a:spLocks noGrp="1"/>
           </p:cNvSpPr>
@@ -1831,7 +1831,7 @@
       </p:sp>
       <p:sp>
         <p:nvSpPr>
-          <p:cNvPr id="1462000302" name="Footer Placeholder 5"/>
+          <p:cNvPr id="486360109" name="Footer Placeholder 5"/>
           <p:cNvSpPr>
             <a:spLocks noGrp="1"/>
           </p:cNvSpPr>
@@ -1853,7 +1853,7 @@
       </p:sp>
       <p:sp>
         <p:nvSpPr>
-          <p:cNvPr id="1871746947" name="Slide Number Placeholder 6"/>
+          <p:cNvPr id="1614122527" name="Slide Number Placeholder 6"/>
           <p:cNvSpPr>
             <a:spLocks noGrp="1"/>
           </p:cNvSpPr>
@@ -1904,7 +1904,7 @@
       </p:grpSpPr>
       <p:sp>
         <p:nvSpPr>
-          <p:cNvPr id="1571499883" name="Title 1"/>
+          <p:cNvPr id="1041228331" name="Title 1"/>
           <p:cNvSpPr>
             <a:spLocks noGrp="1"/>
           </p:cNvSpPr>
@@ -1935,7 +1935,7 @@
       </p:sp>
       <p:sp>
         <p:nvSpPr>
-          <p:cNvPr id="1784235043" name="Text Placeholder 2"/>
+          <p:cNvPr id="1878022854" name="Text Placeholder 2"/>
           <p:cNvSpPr>
             <a:spLocks noGrp="1"/>
           </p:cNvSpPr>
@@ -2003,7 +2003,7 @@
       </p:sp>
       <p:sp>
         <p:nvSpPr>
-          <p:cNvPr id="922834422" name="Content Placeholder 3"/>
+          <p:cNvPr id="1644643407" name="Content Placeholder 3"/>
           <p:cNvSpPr>
             <a:spLocks noGrp="1"/>
           </p:cNvSpPr>
@@ -2074,7 +2074,7 @@
       </p:sp>
       <p:sp>
         <p:nvSpPr>
-          <p:cNvPr id="1434239008" name="Text Placeholder 4"/>
+          <p:cNvPr id="1429904732" name="Text Placeholder 4"/>
           <p:cNvSpPr>
             <a:spLocks noGrp="1"/>
           </p:cNvSpPr>
@@ -2142,7 +2142,7 @@
       </p:sp>
       <p:sp>
         <p:nvSpPr>
-          <p:cNvPr id="919241057" name="Content Placeholder 5"/>
+          <p:cNvPr id="1220019457" name="Content Placeholder 5"/>
           <p:cNvSpPr>
             <a:spLocks noGrp="1"/>
           </p:cNvSpPr>
@@ -2213,7 +2213,7 @@
       </p:sp>
       <p:sp>
         <p:nvSpPr>
-          <p:cNvPr id="2038996249" name="Date Placeholder 6"/>
+          <p:cNvPr id="1480407643" name="Date Placeholder 6"/>
           <p:cNvSpPr>
             <a:spLocks noGrp="1"/>
           </p:cNvSpPr>
@@ -2239,7 +2239,7 @@
       </p:sp>
       <p:sp>
         <p:nvSpPr>
-          <p:cNvPr id="1102796145" name="Footer Placeholder 7"/>
+          <p:cNvPr id="2037112583" name="Footer Placeholder 7"/>
           <p:cNvSpPr>
             <a:spLocks noGrp="1"/>
           </p:cNvSpPr>
@@ -2261,7 +2261,7 @@
       </p:sp>
       <p:sp>
         <p:nvSpPr>
-          <p:cNvPr id="762094740" name="Slide Number Placeholder 8"/>
+          <p:cNvPr id="718374409" name="Slide Number Placeholder 8"/>
           <p:cNvSpPr>
             <a:spLocks noGrp="1"/>
           </p:cNvSpPr>
@@ -2312,7 +2312,7 @@
       </p:grpSpPr>
       <p:sp>
         <p:nvSpPr>
-          <p:cNvPr id="375861676" name="Title 1"/>
+          <p:cNvPr id="184273811" name="Title 1"/>
           <p:cNvSpPr>
             <a:spLocks noGrp="1"/>
           </p:cNvSpPr>
@@ -2338,7 +2338,7 @@
       </p:sp>
       <p:sp>
         <p:nvSpPr>
-          <p:cNvPr id="445142636" name="Date Placeholder 2"/>
+          <p:cNvPr id="1441103611" name="Date Placeholder 2"/>
           <p:cNvSpPr>
             <a:spLocks noGrp="1"/>
           </p:cNvSpPr>
@@ -2364,7 +2364,7 @@
       </p:sp>
       <p:sp>
         <p:nvSpPr>
-          <p:cNvPr id="350334505" name="Footer Placeholder 3"/>
+          <p:cNvPr id="1597972895" name="Footer Placeholder 3"/>
           <p:cNvSpPr>
             <a:spLocks noGrp="1"/>
           </p:cNvSpPr>
@@ -2386,7 +2386,7 @@
       </p:sp>
       <p:sp>
         <p:nvSpPr>
-          <p:cNvPr id="1854148839" name="Slide Number Placeholder 4"/>
+          <p:cNvPr id="797710694" name="Slide Number Placeholder 4"/>
           <p:cNvSpPr>
             <a:spLocks noGrp="1"/>
           </p:cNvSpPr>
@@ -2437,7 +2437,7 @@
       </p:grpSpPr>
       <p:sp>
         <p:nvSpPr>
-          <p:cNvPr id="1976846569" name="Date Placeholder 1"/>
+          <p:cNvPr id="1311437551" name="Date Placeholder 1"/>
           <p:cNvSpPr>
             <a:spLocks noGrp="1"/>
           </p:cNvSpPr>
@@ -2463,7 +2463,7 @@
       </p:sp>
       <p:sp>
         <p:nvSpPr>
-          <p:cNvPr id="2040957566" name="Footer Placeholder 2"/>
+          <p:cNvPr id="625130669" name="Footer Placeholder 2"/>
           <p:cNvSpPr>
             <a:spLocks noGrp="1"/>
           </p:cNvSpPr>
@@ -2485,7 +2485,7 @@
       </p:sp>
       <p:sp>
         <p:nvSpPr>
-          <p:cNvPr id="1147750693" name="Slide Number Placeholder 3"/>
+          <p:cNvPr id="20835437" name="Slide Number Placeholder 3"/>
           <p:cNvSpPr>
             <a:spLocks noGrp="1"/>
           </p:cNvSpPr>
@@ -2536,7 +2536,7 @@
       </p:grpSpPr>
       <p:sp>
         <p:nvSpPr>
-          <p:cNvPr id="130029438" name="Title 1"/>
+          <p:cNvPr id="478861240" name="Title 1"/>
           <p:cNvSpPr>
             <a:spLocks noGrp="1"/>
           </p:cNvSpPr>
@@ -2571,7 +2571,7 @@
       </p:sp>
       <p:sp>
         <p:nvSpPr>
-          <p:cNvPr id="1586579865" name="Content Placeholder 2"/>
+          <p:cNvPr id="1571004554" name="Content Placeholder 2"/>
           <p:cNvSpPr>
             <a:spLocks noGrp="1"/>
           </p:cNvSpPr>
@@ -2670,7 +2670,7 @@
       </p:sp>
       <p:sp>
         <p:nvSpPr>
-          <p:cNvPr id="1491984063" name="Text Placeholder 3"/>
+          <p:cNvPr id="1911887064" name="Text Placeholder 3"/>
           <p:cNvSpPr>
             <a:spLocks noGrp="1"/>
           </p:cNvSpPr>
@@ -2738,7 +2738,7 @@
       </p:sp>
       <p:sp>
         <p:nvSpPr>
-          <p:cNvPr id="1051497128" name="Date Placeholder 4"/>
+          <p:cNvPr id="1480682580" name="Date Placeholder 4"/>
           <p:cNvSpPr>
             <a:spLocks noGrp="1"/>
           </p:cNvSpPr>
@@ -2764,7 +2764,7 @@
       </p:sp>
       <p:sp>
         <p:nvSpPr>
-          <p:cNvPr id="1858820881" name="Footer Placeholder 5"/>
+          <p:cNvPr id="336050699" name="Footer Placeholder 5"/>
           <p:cNvSpPr>
             <a:spLocks noGrp="1"/>
           </p:cNvSpPr>
@@ -2786,7 +2786,7 @@
       </p:sp>
       <p:sp>
         <p:nvSpPr>
-          <p:cNvPr id="1790407095" name="Slide Number Placeholder 6"/>
+          <p:cNvPr id="1542538017" name="Slide Number Placeholder 6"/>
           <p:cNvSpPr>
             <a:spLocks noGrp="1"/>
           </p:cNvSpPr>
@@ -2837,7 +2837,7 @@
       </p:grpSpPr>
       <p:sp>
         <p:nvSpPr>
-          <p:cNvPr id="1470743282" name="Title 1"/>
+          <p:cNvPr id="1990675036" name="Title 1"/>
           <p:cNvSpPr>
             <a:spLocks noGrp="1"/>
           </p:cNvSpPr>
@@ -2872,7 +2872,7 @@
       </p:sp>
       <p:sp>
         <p:nvSpPr>
-          <p:cNvPr id="1711149455" name="Picture Placeholder 2"/>
+          <p:cNvPr id="207328505" name="Picture Placeholder 2"/>
           <p:cNvSpPr>
             <a:spLocks noChangeAspect="1" noGrp="1"/>
           </p:cNvSpPr>
@@ -2940,7 +2940,7 @@
       </p:sp>
       <p:sp>
         <p:nvSpPr>
-          <p:cNvPr id="1734203895" name="Text Placeholder 3"/>
+          <p:cNvPr id="1174493012" name="Text Placeholder 3"/>
           <p:cNvSpPr>
             <a:spLocks noGrp="1"/>
           </p:cNvSpPr>
@@ -3008,7 +3008,7 @@
       </p:sp>
       <p:sp>
         <p:nvSpPr>
-          <p:cNvPr id="1060540682" name="Date Placeholder 4"/>
+          <p:cNvPr id="775918506" name="Date Placeholder 4"/>
           <p:cNvSpPr>
             <a:spLocks noGrp="1"/>
           </p:cNvSpPr>
@@ -3034,7 +3034,7 @@
       </p:sp>
       <p:sp>
         <p:nvSpPr>
-          <p:cNvPr id="1261394502" name="Footer Placeholder 5"/>
+          <p:cNvPr id="1351305307" name="Footer Placeholder 5"/>
           <p:cNvSpPr>
             <a:spLocks noGrp="1"/>
           </p:cNvSpPr>
@@ -3056,7 +3056,7 @@
       </p:sp>
       <p:sp>
         <p:nvSpPr>
-          <p:cNvPr id="823949229" name="Slide Number Placeholder 6"/>
+          <p:cNvPr id="188786442" name="Slide Number Placeholder 6"/>
           <p:cNvSpPr>
             <a:spLocks noGrp="1"/>
           </p:cNvSpPr>
@@ -3112,7 +3112,7 @@
       </p:grpSpPr>
       <p:sp>
         <p:nvSpPr>
-          <p:cNvPr id="1757934013" name="Title Placeholder 1"/>
+          <p:cNvPr id="350284358" name="Title Placeholder 1"/>
           <p:cNvSpPr>
             <a:spLocks noGrp="1"/>
           </p:cNvSpPr>
@@ -3148,7 +3148,7 @@
       </p:sp>
       <p:sp>
         <p:nvSpPr>
-          <p:cNvPr id="2081726255" name="Text Placeholder 2"/>
+          <p:cNvPr id="1258180154" name="Text Placeholder 2"/>
           <p:cNvSpPr>
             <a:spLocks noGrp="1"/>
           </p:cNvSpPr>
@@ -3224,7 +3224,7 @@
       </p:sp>
       <p:sp>
         <p:nvSpPr>
-          <p:cNvPr id="749586259" name="Date Placeholder 3"/>
+          <p:cNvPr id="126646052" name="Date Placeholder 3"/>
           <p:cNvSpPr>
             <a:spLocks noGrp="1"/>
           </p:cNvSpPr>
@@ -3268,7 +3268,7 @@
       </p:sp>
       <p:sp>
         <p:nvSpPr>
-          <p:cNvPr id="1500838086" name="Footer Placeholder 4"/>
+          <p:cNvPr id="657074564" name="Footer Placeholder 4"/>
           <p:cNvSpPr>
             <a:spLocks noGrp="1"/>
           </p:cNvSpPr>
@@ -3308,7 +3308,7 @@
       </p:sp>
       <p:sp>
         <p:nvSpPr>
-          <p:cNvPr id="1085486080" name="Slide Number Placeholder 5"/>
+          <p:cNvPr id="1810651086" name="Slide Number Placeholder 5"/>
           <p:cNvSpPr>
             <a:spLocks noGrp="1"/>
           </p:cNvSpPr>
@@ -3668,7 +3668,7 @@
       </p:grpSpPr>
       <p:sp>
         <p:nvSpPr>
-          <p:cNvPr id="619090259" name="Arc 773505673"/>
+          <p:cNvPr id="554871584" name="Arc 773505673"/>
           <p:cNvSpPr/>
           <p:nvPr/>
         </p:nvSpPr>
@@ -3721,7 +3721,7 @@
       </p:sp>
       <p:cxnSp>
         <p:nvCxnSpPr>
-          <p:cNvPr id="1598137037" name=""/>
+          <p:cNvPr id="1710201686" name=""/>
           <p:cNvCxnSpPr/>
           <p:nvPr/>
         </p:nvCxnSpPr>
@@ -3761,7 +3761,7 @@
       </p:cxnSp>
       <p:cxnSp>
         <p:nvCxnSpPr>
-          <p:cNvPr id="1122862355" name=""/>
+          <p:cNvPr id="679446510" name=""/>
           <p:cNvCxnSpPr/>
           <p:nvPr/>
         </p:nvCxnSpPr>
@@ -3801,7 +3801,7 @@
       </p:cxnSp>
       <p:sp>
         <p:nvSpPr>
-          <p:cNvPr id="853136199" name=""/>
+          <p:cNvPr id="624553251" name=""/>
           <p:cNvSpPr/>
           <p:nvPr/>
         </p:nvSpPr>
@@ -3845,7 +3845,7 @@
       </p:sp>
       <p:sp>
         <p:nvSpPr>
-          <p:cNvPr id="1757347675" name="Arc 773505673"/>
+          <p:cNvPr id="168724593" name="Arc 773505673"/>
           <p:cNvSpPr/>
           <p:nvPr/>
         </p:nvSpPr>
@@ -3889,7 +3889,7 @@
       </p:sp>
       <p:sp>
         <p:nvSpPr>
-          <p:cNvPr id="1768890442" name=""/>
+          <p:cNvPr id="516889693" name=""/>
           <p:cNvSpPr txBox="1"/>
           <p:nvPr/>
         </p:nvSpPr>
@@ -3933,7 +3933,7 @@
       </p:sp>
       <p:sp>
         <p:nvSpPr>
-          <p:cNvPr id="61780068" name=""/>
+          <p:cNvPr id="1028467183" name=""/>
           <p:cNvSpPr txBox="1"/>
           <p:nvPr/>
         </p:nvSpPr>
@@ -3973,7 +3973,7 @@
       </p:sp>
       <p:sp>
         <p:nvSpPr>
-          <p:cNvPr id="646736665" name=""/>
+          <p:cNvPr id="996017704" name=""/>
           <p:cNvSpPr txBox="1"/>
           <p:nvPr/>
         </p:nvSpPr>
@@ -4005,7 +4005,7 @@
       </p:sp>
       <p:sp>
         <p:nvSpPr>
-          <p:cNvPr id="2107160507" name=""/>
+          <p:cNvPr id="1006015147" name=""/>
           <p:cNvSpPr txBox="1"/>
           <p:nvPr/>
         </p:nvSpPr>
@@ -4037,7 +4037,7 @@
       </p:sp>
       <p:cxnSp>
         <p:nvCxnSpPr>
-          <p:cNvPr id="470401254" name=""/>
+          <p:cNvPr id="122567219" name=""/>
           <p:cNvCxnSpPr/>
           <p:nvPr/>
         </p:nvCxnSpPr>
@@ -4076,7 +4076,7 @@
       </p:cxnSp>
       <p:cxnSp>
         <p:nvCxnSpPr>
-          <p:cNvPr id="1233805748" name=""/>
+          <p:cNvPr id="617228398" name=""/>
           <p:cNvCxnSpPr/>
           <p:nvPr/>
         </p:nvCxnSpPr>
@@ -4116,7 +4116,7 @@
       </p:cxnSp>
       <p:cxnSp>
         <p:nvCxnSpPr>
-          <p:cNvPr id="1619063349" name=""/>
+          <p:cNvPr id="1376228677" name=""/>
           <p:cNvCxnSpPr/>
           <p:nvPr/>
         </p:nvCxnSpPr>
@@ -4156,7 +4156,7 @@
       </p:cxnSp>
       <p:cxnSp>
         <p:nvCxnSpPr>
-          <p:cNvPr id="1254073424" name=""/>
+          <p:cNvPr id="399219498" name=""/>
           <p:cNvCxnSpPr/>
           <p:nvPr/>
         </p:nvCxnSpPr>
@@ -4196,7 +4196,7 @@
       </p:cxnSp>
       <p:sp>
         <p:nvSpPr>
-          <p:cNvPr id="2131253324" name="Arc 773505673"/>
+          <p:cNvPr id="106852535" name="Arc 773505673"/>
           <p:cNvSpPr/>
           <p:nvPr/>
         </p:nvSpPr>
@@ -4240,7 +4240,7 @@
       </p:sp>
       <p:sp>
         <p:nvSpPr>
-          <p:cNvPr id="1904198020" name=""/>
+          <p:cNvPr id="259661463" name=""/>
           <p:cNvSpPr txBox="1"/>
           <p:nvPr/>
         </p:nvSpPr>
@@ -4284,7 +4284,7 @@
       </p:sp>
       <p:sp>
         <p:nvSpPr>
-          <p:cNvPr id="1060403882" name="Arc 773505673"/>
+          <p:cNvPr id="1126254101" name="Arc 773505673"/>
           <p:cNvSpPr/>
           <p:nvPr/>
         </p:nvSpPr>
@@ -4328,7 +4328,7 @@
       </p:sp>
       <p:cxnSp>
         <p:nvCxnSpPr>
-          <p:cNvPr id="1382759685" name=""/>
+          <p:cNvPr id="748751447" name=""/>
           <p:cNvCxnSpPr/>
           <p:nvPr/>
         </p:nvCxnSpPr>
@@ -4367,7 +4367,7 @@
       </p:cxnSp>
       <p:sp>
         <p:nvSpPr>
-          <p:cNvPr id="790894595" name=""/>
+          <p:cNvPr id="1938867495" name=""/>
           <p:cNvSpPr txBox="1"/>
           <p:nvPr/>
         </p:nvSpPr>
@@ -4407,7 +4407,7 @@
       </p:sp>
       <p:sp>
         <p:nvSpPr>
-          <p:cNvPr id="883073020" name="Arc 773505673"/>
+          <p:cNvPr id="1400548818" name="Arc 773505673"/>
           <p:cNvSpPr/>
           <p:nvPr/>
         </p:nvSpPr>
@@ -4451,7 +4451,7 @@
       </p:sp>
       <p:sp>
         <p:nvSpPr>
-          <p:cNvPr id="1833183050" name=""/>
+          <p:cNvPr id="1238031020" name=""/>
           <p:cNvSpPr txBox="1"/>
           <p:nvPr/>
         </p:nvSpPr>
@@ -4491,7 +4491,7 @@
       </p:sp>
       <p:sp>
         <p:nvSpPr>
-          <p:cNvPr id="1247461929" name="Arc 773505673"/>
+          <p:cNvPr id="825910587" name="Arc 773505673"/>
           <p:cNvSpPr/>
           <p:nvPr/>
         </p:nvSpPr>
@@ -4544,7 +4544,7 @@
       </p:sp>
       <p:sp>
         <p:nvSpPr>
-          <p:cNvPr id="37406250" name=""/>
+          <p:cNvPr id="409400583" name=""/>
           <p:cNvSpPr txBox="1"/>
           <p:nvPr/>
         </p:nvSpPr>
@@ -4588,7 +4588,7 @@
       </p:sp>
       <p:cxnSp>
         <p:nvCxnSpPr>
-          <p:cNvPr id="1020444147" name=""/>
+          <p:cNvPr id="345038318" name=""/>
           <p:cNvCxnSpPr/>
           <p:nvPr/>
         </p:nvCxnSpPr>
@@ -4628,12 +4628,12 @@
       </p:cxnSp>
       <p:sp>
         <p:nvSpPr>
-          <p:cNvPr id="1307881512" name=""/>
+          <p:cNvPr id="1830258720" name=""/>
           <p:cNvSpPr txBox="1"/>
           <p:nvPr/>
         </p:nvSpPr>
         <p:spPr bwMode="auto">
-          <a:xfrm rot="18412261" flipH="0" flipV="0">
+          <a:xfrm rot="18412260" flipH="0" flipV="0">
             <a:off x="6617376" y="4563624"/>
             <a:ext cx="1402994" cy="427079"/>
           </a:xfrm>
@@ -4690,7 +4690,7 @@
       </p:sp>
       <p:sp>
         <p:nvSpPr>
-          <p:cNvPr id="1674855924" name=""/>
+          <p:cNvPr id="386541583" name=""/>
           <p:cNvSpPr txBox="1"/>
           <p:nvPr/>
         </p:nvSpPr>
@@ -4722,13 +4722,13 @@
       </p:sp>
       <p:cxnSp>
         <p:nvCxnSpPr>
-          <p:cNvPr id="1083425762" name=""/>
+          <p:cNvPr id="1276816065" name=""/>
           <p:cNvCxnSpPr/>
           <p:nvPr/>
         </p:nvCxnSpPr>
         <p:spPr bwMode="auto">
           <a:xfrm flipH="0" flipV="0">
-            <a:off x="5799562" y="1842749"/>
+            <a:off x="5799562" y="1842748"/>
             <a:ext cx="577452" cy="339328"/>
           </a:xfrm>
           <a:prstGeom prst="line">
@@ -4763,14 +4763,14 @@
       </p:cxnSp>
       <p:sp>
         <p:nvSpPr>
-          <p:cNvPr id="1961217778" name=""/>
+          <p:cNvPr id="1605415058" name=""/>
           <p:cNvSpPr txBox="1"/>
           <p:nvPr/>
         </p:nvSpPr>
         <p:spPr bwMode="auto">
           <a:xfrm rot="0" flipH="0" flipV="0">
             <a:off x="5968237" y="1712451"/>
-            <a:ext cx="427476" cy="305159"/>
+            <a:ext cx="427475" cy="305159"/>
           </a:xfrm>
           <a:prstGeom prst="rect">
             <a:avLst/>
@@ -4802,6 +4802,108 @@
               <a:t>cr</a:t>
             </a:r>
             <a:endParaRPr sz="1400" baseline="-25000"/>
+          </a:p>
+        </p:txBody>
+      </p:sp>
+      <p:sp>
+        <p:nvSpPr>
+          <p:cNvPr id="395438155" name=""/>
+          <p:cNvSpPr txBox="1"/>
+          <p:nvPr/>
+        </p:nvSpPr>
+        <p:spPr bwMode="auto">
+          <a:xfrm rot="0" flipH="0" flipV="0">
+            <a:off x="5828110" y="2404723"/>
+            <a:ext cx="353863" cy="307141"/>
+          </a:xfrm>
+          <a:prstGeom prst="rect">
+            <a:avLst/>
+          </a:prstGeom>
+          <a:noFill/>
+        </p:spPr>
+        <p:txBody>
+          <a:bodyPr vertOverflow="overflow" horzOverflow="overflow" vert="horz" wrap="none" lIns="91440" tIns="45720" rIns="91440" bIns="45720" numCol="1" spcCol="0" rtlCol="0" fromWordArt="0" anchor="t" anchorCtr="0" forceAA="0" upright="0" compatLnSpc="0">
+            <a:spAutoFit/>
+          </a:bodyPr>
+          <a:p>
+            <a:pPr>
+              <a:defRPr/>
+            </a:pPr>
+            <a:r>
+              <a:rPr sz="1400" b="1">
+                <a:solidFill>
+                  <a:srgbClr val="00B050"/>
+                </a:solidFill>
+                <a:latin typeface="Andale Mono"/>
+                <a:ea typeface="Andale Mono"/>
+                <a:cs typeface="Andale Mono"/>
+              </a:rPr>
+              <a:t>n</a:t>
+            </a:r>
+            <a:r>
+              <a:rPr sz="1400" b="1" baseline="-25000">
+                <a:solidFill>
+                  <a:srgbClr val="00B050"/>
+                </a:solidFill>
+              </a:rPr>
+              <a:t>1</a:t>
+            </a:r>
+            <a:endParaRPr sz="1400" b="1" baseline="-25000">
+              <a:solidFill>
+                <a:srgbClr val="00B050"/>
+              </a:solidFill>
+            </a:endParaRPr>
+          </a:p>
+        </p:txBody>
+      </p:sp>
+      <p:sp>
+        <p:nvSpPr>
+          <p:cNvPr id="1102039886" name=""/>
+          <p:cNvSpPr txBox="1"/>
+          <p:nvPr/>
+        </p:nvSpPr>
+        <p:spPr bwMode="auto">
+          <a:xfrm rot="0" flipH="0" flipV="0">
+            <a:off x="6123385" y="2557123"/>
+            <a:ext cx="353863" cy="307141"/>
+          </a:xfrm>
+          <a:prstGeom prst="rect">
+            <a:avLst/>
+          </a:prstGeom>
+          <a:noFill/>
+        </p:spPr>
+        <p:txBody>
+          <a:bodyPr vertOverflow="overflow" horzOverflow="overflow" vert="horz" wrap="none" lIns="91440" tIns="45720" rIns="91440" bIns="45720" numCol="1" spcCol="0" rtlCol="0" fromWordArt="0" anchor="t" anchorCtr="0" forceAA="0" upright="0" compatLnSpc="0">
+            <a:spAutoFit/>
+          </a:bodyPr>
+          <a:p>
+            <a:pPr>
+              <a:defRPr/>
+            </a:pPr>
+            <a:r>
+              <a:rPr sz="1400" b="1">
+                <a:solidFill>
+                  <a:schemeClr val="tx1"/>
+                </a:solidFill>
+                <a:latin typeface="Andale Mono"/>
+                <a:ea typeface="Andale Mono"/>
+                <a:cs typeface="Andale Mono"/>
+              </a:rPr>
+              <a:t>n</a:t>
+            </a:r>
+            <a:r>
+              <a:rPr sz="1400" b="1" baseline="-25000">
+                <a:solidFill>
+                  <a:schemeClr val="tx1"/>
+                </a:solidFill>
+              </a:rPr>
+              <a:t>2</a:t>
+            </a:r>
+            <a:endParaRPr sz="1400" b="1" baseline="-25000">
+              <a:solidFill>
+                <a:schemeClr val="tx1"/>
+              </a:solidFill>
+            </a:endParaRPr>
           </a:p>
         </p:txBody>
       </p:sp>
